--- a/Documents/KoliPortal.pptx
+++ b/Documents/KoliPortal.pptx
@@ -326,7 +326,7 @@
           <a:p>
             <a:fld id="{0EF64679-D50F-4F4B-A450-79123A015CA2}" type="datetimeFigureOut">
               <a:rPr lang="hu-HU" smtClean="0"/>
-              <a:t>2026. 04. 12.</a:t>
+              <a:t>2026. 04. 14.</a:t>
             </a:fld>
             <a:endParaRPr lang="hu-HU"/>
           </a:p>
@@ -625,7 +625,7 @@
           <a:p>
             <a:fld id="{0EF64679-D50F-4F4B-A450-79123A015CA2}" type="datetimeFigureOut">
               <a:rPr lang="hu-HU" smtClean="0"/>
-              <a:t>2026. 04. 12.</a:t>
+              <a:t>2026. 04. 14.</a:t>
             </a:fld>
             <a:endParaRPr lang="hu-HU"/>
           </a:p>
@@ -843,7 +843,7 @@
           <a:p>
             <a:fld id="{0EF64679-D50F-4F4B-A450-79123A015CA2}" type="datetimeFigureOut">
               <a:rPr lang="hu-HU" smtClean="0"/>
-              <a:t>2026. 04. 12.</a:t>
+              <a:t>2026. 04. 14.</a:t>
             </a:fld>
             <a:endParaRPr lang="hu-HU"/>
           </a:p>
@@ -1140,7 +1140,7 @@
           <a:p>
             <a:fld id="{0EF64679-D50F-4F4B-A450-79123A015CA2}" type="datetimeFigureOut">
               <a:rPr lang="hu-HU" smtClean="0"/>
-              <a:t>2026. 04. 12.</a:t>
+              <a:t>2026. 04. 14.</a:t>
             </a:fld>
             <a:endParaRPr lang="hu-HU"/>
           </a:p>
@@ -1505,7 +1505,7 @@
           <a:p>
             <a:fld id="{0EF64679-D50F-4F4B-A450-79123A015CA2}" type="datetimeFigureOut">
               <a:rPr lang="hu-HU" smtClean="0"/>
-              <a:t>2026. 04. 12.</a:t>
+              <a:t>2026. 04. 14.</a:t>
             </a:fld>
             <a:endParaRPr lang="hu-HU"/>
           </a:p>
@@ -2152,7 +2152,7 @@
           <a:p>
             <a:fld id="{0EF64679-D50F-4F4B-A450-79123A015CA2}" type="datetimeFigureOut">
               <a:rPr lang="hu-HU" smtClean="0"/>
-              <a:t>2026. 04. 12.</a:t>
+              <a:t>2026. 04. 14.</a:t>
             </a:fld>
             <a:endParaRPr lang="hu-HU"/>
           </a:p>
@@ -3036,7 +3036,7 @@
           <a:p>
             <a:fld id="{0EF64679-D50F-4F4B-A450-79123A015CA2}" type="datetimeFigureOut">
               <a:rPr lang="hu-HU" smtClean="0"/>
-              <a:t>2026. 04. 12.</a:t>
+              <a:t>2026. 04. 14.</a:t>
             </a:fld>
             <a:endParaRPr lang="hu-HU"/>
           </a:p>
@@ -3230,7 +3230,7 @@
           <a:p>
             <a:fld id="{0EF64679-D50F-4F4B-A450-79123A015CA2}" type="datetimeFigureOut">
               <a:rPr lang="hu-HU" smtClean="0"/>
-              <a:t>2026. 04. 12.</a:t>
+              <a:t>2026. 04. 14.</a:t>
             </a:fld>
             <a:endParaRPr lang="hu-HU"/>
           </a:p>
@@ -3434,7 +3434,7 @@
           <a:p>
             <a:fld id="{0EF64679-D50F-4F4B-A450-79123A015CA2}" type="datetimeFigureOut">
               <a:rPr lang="hu-HU" smtClean="0"/>
-              <a:t>2026. 04. 12.</a:t>
+              <a:t>2026. 04. 14.</a:t>
             </a:fld>
             <a:endParaRPr lang="hu-HU"/>
           </a:p>
@@ -3628,7 +3628,7 @@
           <a:p>
             <a:fld id="{0EF64679-D50F-4F4B-A450-79123A015CA2}" type="datetimeFigureOut">
               <a:rPr lang="hu-HU" smtClean="0"/>
-              <a:t>2026. 04. 12.</a:t>
+              <a:t>2026. 04. 14.</a:t>
             </a:fld>
             <a:endParaRPr lang="hu-HU"/>
           </a:p>
@@ -3899,7 +3899,7 @@
           <a:p>
             <a:fld id="{0EF64679-D50F-4F4B-A450-79123A015CA2}" type="datetimeFigureOut">
               <a:rPr lang="hu-HU" smtClean="0"/>
-              <a:t>2026. 04. 12.</a:t>
+              <a:t>2026. 04. 14.</a:t>
             </a:fld>
             <a:endParaRPr lang="hu-HU"/>
           </a:p>
@@ -4215,7 +4215,7 @@
           <a:p>
             <a:fld id="{0EF64679-D50F-4F4B-A450-79123A015CA2}" type="datetimeFigureOut">
               <a:rPr lang="hu-HU" smtClean="0"/>
-              <a:t>2026. 04. 12.</a:t>
+              <a:t>2026. 04. 14.</a:t>
             </a:fld>
             <a:endParaRPr lang="hu-HU"/>
           </a:p>
@@ -4683,7 +4683,7 @@
           <a:p>
             <a:fld id="{0EF64679-D50F-4F4B-A450-79123A015CA2}" type="datetimeFigureOut">
               <a:rPr lang="hu-HU" smtClean="0"/>
-              <a:t>2026. 04. 12.</a:t>
+              <a:t>2026. 04. 14.</a:t>
             </a:fld>
             <a:endParaRPr lang="hu-HU"/>
           </a:p>
@@ -4825,7 +4825,7 @@
           <a:p>
             <a:fld id="{0EF64679-D50F-4F4B-A450-79123A015CA2}" type="datetimeFigureOut">
               <a:rPr lang="hu-HU" smtClean="0"/>
-              <a:t>2026. 04. 12.</a:t>
+              <a:t>2026. 04. 14.</a:t>
             </a:fld>
             <a:endParaRPr lang="hu-HU"/>
           </a:p>
@@ -4944,7 +4944,7 @@
           <a:p>
             <a:fld id="{0EF64679-D50F-4F4B-A450-79123A015CA2}" type="datetimeFigureOut">
               <a:rPr lang="hu-HU" smtClean="0"/>
-              <a:t>2026. 04. 12.</a:t>
+              <a:t>2026. 04. 14.</a:t>
             </a:fld>
             <a:endParaRPr lang="hu-HU"/>
           </a:p>
@@ -5247,7 +5247,7 @@
           <a:p>
             <a:fld id="{0EF64679-D50F-4F4B-A450-79123A015CA2}" type="datetimeFigureOut">
               <a:rPr lang="hu-HU" smtClean="0"/>
-              <a:t>2026. 04. 12.</a:t>
+              <a:t>2026. 04. 14.</a:t>
             </a:fld>
             <a:endParaRPr lang="hu-HU"/>
           </a:p>
@@ -5546,7 +5546,7 @@
           <a:p>
             <a:fld id="{0EF64679-D50F-4F4B-A450-79123A015CA2}" type="datetimeFigureOut">
               <a:rPr lang="hu-HU" smtClean="0"/>
-              <a:t>2026. 04. 12.</a:t>
+              <a:t>2026. 04. 14.</a:t>
             </a:fld>
             <a:endParaRPr lang="hu-HU"/>
           </a:p>
@@ -6673,11 +6673,14 @@
           <a:prstGeom prst="rect">
             <a:avLst/>
           </a:prstGeom>
+          <a:ln>
+            <a:noFill/>
+          </a:ln>
           <a:effectLst>
-            <a:outerShdw blurRad="50800" dist="38100" dir="5400000" algn="t" rotWithShape="0">
-              <a:prstClr val="black">
-                <a:alpha val="43000"/>
-              </a:prstClr>
+            <a:outerShdw blurRad="292100" dist="139700" dir="2700000" algn="tl" rotWithShape="0">
+              <a:srgbClr val="333333">
+                <a:alpha val="65000"/>
+              </a:srgbClr>
             </a:outerShdw>
           </a:effectLst>
         </p:spPr>
@@ -6741,6 +6744,55 @@
           </a:p>
         </p:txBody>
       </p:sp>
+      <p:pic>
+        <p:nvPicPr>
+          <p:cNvPr id="5" name="Kép 4">
+            <a:extLst>
+              <a:ext uri="{FF2B5EF4-FFF2-40B4-BE49-F238E27FC236}">
+                <a16:creationId xmlns:a16="http://schemas.microsoft.com/office/drawing/2014/main" id="{9C4553DE-8803-9091-4DD7-C471F3FB457D}"/>
+              </a:ext>
+            </a:extLst>
+          </p:cNvPr>
+          <p:cNvPicPr>
+            <a:picLocks noChangeAspect="1"/>
+          </p:cNvPicPr>
+          <p:nvPr/>
+        </p:nvPicPr>
+        <p:blipFill>
+          <a:blip r:embed="rId4">
+            <a:extLst>
+              <a:ext uri="{28A0092B-C50C-407E-A947-70E740481C1C}">
+                <a14:useLocalDpi xmlns:a14="http://schemas.microsoft.com/office/drawing/2010/main" val="0"/>
+              </a:ext>
+            </a:extLst>
+          </a:blip>
+          <a:stretch>
+            <a:fillRect/>
+          </a:stretch>
+        </p:blipFill>
+        <p:spPr>
+          <a:xfrm>
+            <a:off x="5316229" y="640080"/>
+            <a:ext cx="5410916" cy="3607277"/>
+          </a:xfrm>
+          <a:prstGeom prst="roundRect">
+            <a:avLst>
+              <a:gd name="adj" fmla="val 8594"/>
+            </a:avLst>
+          </a:prstGeom>
+          <a:solidFill>
+            <a:srgbClr val="FFFFFF">
+              <a:shade val="85000"/>
+            </a:srgbClr>
+          </a:solidFill>
+          <a:ln>
+            <a:noFill/>
+          </a:ln>
+          <a:effectLst>
+            <a:reflection blurRad="12700" stA="38000" endPos="28000" dist="5000" dir="5400000" sy="-100000" algn="bl" rotWithShape="0"/>
+          </a:effectLst>
+        </p:spPr>
+      </p:pic>
     </p:spTree>
     <p:extLst>
       <p:ext uri="{BB962C8B-B14F-4D97-AF65-F5344CB8AC3E}">
@@ -16163,8 +16215,8 @@
         </p:nvSpPr>
         <p:spPr>
           <a:xfrm>
-            <a:off x="5365631" y="1967844"/>
-            <a:ext cx="7474863" cy="4779509"/>
+            <a:off x="5365631" y="1967845"/>
+            <a:ext cx="7474863" cy="3213756"/>
           </a:xfrm>
           <a:prstGeom prst="roundRect">
             <a:avLst/>
